--- a/dist/weeks-1학기/서비스디자인_1학기_06주차_아이디에이션.pptx
+++ b/dist/weeks-1학기/서비스디자인_1학기_06주차_아이디에이션.pptx
@@ -5250,6 +5250,95 @@
             <a:avLst/>
           </a:prstGeom>
           <a:solidFill>
+            <a:srgbClr val="FFFFFF"/>
+          </a:solidFill>
+          <a:ln w="12700">
+            <a:solidFill>
+              <a:srgbClr val="111111"/>
+            </a:solidFill>
+            <a:prstDash val="solid"/>
+          </a:ln>
+        </p:spPr>
+      </p:sp>
+      <p:sp>
+        <p:nvSpPr>
+          <p:cNvPr id="10" name="Shape 8"/>
+          <p:cNvSpPr/>
+          <p:nvPr/>
+        </p:nvSpPr>
+        <p:spPr>
+          <a:xfrm>
+            <a:off x="640080" y="1627632"/>
+            <a:ext cx="5254600" cy="64008"/>
+          </a:xfrm>
+          <a:prstGeom prst="rect">
+            <a:avLst/>
+          </a:prstGeom>
+          <a:solidFill>
+            <a:srgbClr val="111111"/>
+          </a:solidFill>
+          <a:ln w="12700">
+            <a:solidFill>
+              <a:srgbClr val="111111"/>
+            </a:solidFill>
+            <a:prstDash val="solid"/>
+          </a:ln>
+        </p:spPr>
+      </p:sp>
+      <p:sp>
+        <p:nvSpPr>
+          <p:cNvPr id="11" name="Text 9"/>
+          <p:cNvSpPr/>
+          <p:nvPr/>
+        </p:nvSpPr>
+        <p:spPr>
+          <a:xfrm>
+            <a:off x="1042416" y="1901952"/>
+            <a:ext cx="4449928" cy="365760"/>
+          </a:xfrm>
+          <a:prstGeom prst="rect">
+            <a:avLst/>
+          </a:prstGeom>
+          <a:noFill/>
+          <a:ln/>
+        </p:spPr>
+        <p:txBody>
+          <a:bodyPr wrap="square" lIns="0" tIns="0" rIns="0" bIns="0" rtlCol="0" anchor="ctr"/>
+          <a:lstStyle/>
+          <a:p>
+            <a:pPr indent="0" marL="0">
+              <a:buNone/>
+            </a:pPr>
+            <a:r>
+              <a:rPr lang="en-US" sz="1700" dirty="0">
+                <a:solidFill>
+                  <a:srgbClr val="111111"/>
+                </a:solidFill>
+                <a:latin typeface="Pretendard SemiBold" pitchFamily="34" charset="0"/>
+                <a:ea typeface="Pretendard SemiBold" pitchFamily="34" charset="-122"/>
+                <a:cs typeface="Pretendard SemiBold" pitchFamily="34" charset="-120"/>
+              </a:rPr>
+              <a:t>잘 골라진 3안</a:t>
+            </a:r>
+            <a:endParaRPr lang="en-US" sz="1700" dirty="0"/>
+          </a:p>
+        </p:txBody>
+      </p:sp>
+      <p:sp>
+        <p:nvSpPr>
+          <p:cNvPr id="12" name="Shape 10"/>
+          <p:cNvSpPr/>
+          <p:nvPr/>
+        </p:nvSpPr>
+        <p:spPr>
+          <a:xfrm>
+            <a:off x="6297016" y="1627632"/>
+            <a:ext cx="5254600" cy="2761488"/>
+          </a:xfrm>
+          <a:prstGeom prst="rect">
+            <a:avLst/>
+          </a:prstGeom>
+          <a:solidFill>
             <a:srgbClr val="F2F2F2"/>
           </a:solidFill>
           <a:ln w="12700">
@@ -5262,13 +5351,13 @@
       </p:sp>
       <p:sp>
         <p:nvSpPr>
-          <p:cNvPr id="10" name="Text 8"/>
-          <p:cNvSpPr/>
-          <p:nvPr/>
-        </p:nvSpPr>
-        <p:spPr>
-          <a:xfrm>
-            <a:off x="1042416" y="1901952"/>
+          <p:cNvPr id="13" name="Text 11"/>
+          <p:cNvSpPr/>
+          <p:nvPr/>
+        </p:nvSpPr>
+        <p:spPr>
+          <a:xfrm>
+            <a:off x="6699352" y="1901952"/>
             <a:ext cx="4449928" cy="365760"/>
           </a:xfrm>
           <a:prstGeom prst="rect">
@@ -5287,13 +5376,13 @@
             <a:r>
               <a:rPr lang="en-US" sz="1700" dirty="0">
                 <a:solidFill>
-                  <a:srgbClr val="111111"/>
+                  <a:srgbClr val="9B9B9B"/>
                 </a:solidFill>
                 <a:latin typeface="Pretendard SemiBold" pitchFamily="34" charset="0"/>
                 <a:ea typeface="Pretendard SemiBold" pitchFamily="34" charset="-122"/>
                 <a:cs typeface="Pretendard SemiBold" pitchFamily="34" charset="-120"/>
               </a:rPr>
-              <a:t>잘 골라진 3안</a:t>
+              <a:t>다시 골라야 하는 3안</a:t>
             </a:r>
             <a:endParaRPr lang="en-US" sz="1700" dirty="0"/>
           </a:p>
@@ -5301,71 +5390,7 @@
       </p:sp>
       <p:sp>
         <p:nvSpPr>
-          <p:cNvPr id="11" name="Shape 9"/>
-          <p:cNvSpPr/>
-          <p:nvPr/>
-        </p:nvSpPr>
-        <p:spPr>
-          <a:xfrm>
-            <a:off x="6297016" y="1627632"/>
-            <a:ext cx="5254600" cy="2761488"/>
-          </a:xfrm>
-          <a:prstGeom prst="rect">
-            <a:avLst/>
-          </a:prstGeom>
-          <a:solidFill>
-            <a:srgbClr val="FFFFFF"/>
-          </a:solidFill>
-          <a:ln w="12700">
-            <a:solidFill>
-              <a:srgbClr val="DCDCDC"/>
-            </a:solidFill>
-            <a:prstDash val="solid"/>
-          </a:ln>
-        </p:spPr>
-      </p:sp>
-      <p:sp>
-        <p:nvSpPr>
-          <p:cNvPr id="12" name="Text 10"/>
-          <p:cNvSpPr/>
-          <p:nvPr/>
-        </p:nvSpPr>
-        <p:spPr>
-          <a:xfrm>
-            <a:off x="6699352" y="1901952"/>
-            <a:ext cx="4449928" cy="365760"/>
-          </a:xfrm>
-          <a:prstGeom prst="rect">
-            <a:avLst/>
-          </a:prstGeom>
-          <a:noFill/>
-          <a:ln/>
-        </p:spPr>
-        <p:txBody>
-          <a:bodyPr wrap="square" lIns="0" tIns="0" rIns="0" bIns="0" rtlCol="0" anchor="ctr"/>
-          <a:lstStyle/>
-          <a:p>
-            <a:pPr indent="0" marL="0">
-              <a:buNone/>
-            </a:pPr>
-            <a:r>
-              <a:rPr lang="en-US" sz="1700" dirty="0">
-                <a:solidFill>
-                  <a:srgbClr val="9B9B9B"/>
-                </a:solidFill>
-                <a:latin typeface="Pretendard SemiBold" pitchFamily="34" charset="0"/>
-                <a:ea typeface="Pretendard SemiBold" pitchFamily="34" charset="-122"/>
-                <a:cs typeface="Pretendard SemiBold" pitchFamily="34" charset="-120"/>
-              </a:rPr>
-              <a:t>다시 골라야 하는 3안</a:t>
-            </a:r>
-            <a:endParaRPr lang="en-US" sz="1700" dirty="0"/>
-          </a:p>
-        </p:txBody>
-      </p:sp>
-      <p:sp>
-        <p:nvSpPr>
-          <p:cNvPr id="13" name="Text 11"/>
+          <p:cNvPr id="14" name="Text 12"/>
           <p:cNvSpPr/>
           <p:nvPr/>
         </p:nvSpPr>
@@ -5404,7 +5429,7 @@
       </p:sp>
       <p:sp>
         <p:nvSpPr>
-          <p:cNvPr id="14" name="Text 12"/>
+          <p:cNvPr id="15" name="Text 13"/>
           <p:cNvSpPr/>
           <p:nvPr/>
         </p:nvSpPr>
@@ -5430,7 +5455,7 @@
               <a:buNone/>
             </a:pPr>
             <a:r>
-              <a:rPr lang="en-US" sz="1150" dirty="0">
+              <a:rPr lang="en-US" sz="1150" b="1" dirty="0">
                 <a:solidFill>
                   <a:srgbClr val="1F1F1F"/>
                 </a:solidFill>
@@ -5446,7 +5471,7 @@
       </p:sp>
       <p:sp>
         <p:nvSpPr>
-          <p:cNvPr id="15" name="Text 13"/>
+          <p:cNvPr id="16" name="Text 14"/>
           <p:cNvSpPr/>
           <p:nvPr/>
         </p:nvSpPr>
@@ -5485,7 +5510,7 @@
       </p:sp>
       <p:sp>
         <p:nvSpPr>
-          <p:cNvPr id="16" name="Text 14"/>
+          <p:cNvPr id="17" name="Text 15"/>
           <p:cNvSpPr/>
           <p:nvPr/>
         </p:nvSpPr>
@@ -5527,7 +5552,7 @@
       </p:sp>
       <p:sp>
         <p:nvSpPr>
-          <p:cNvPr id="17" name="Shape 15"/>
+          <p:cNvPr id="18" name="Shape 16"/>
           <p:cNvSpPr/>
           <p:nvPr/>
         </p:nvSpPr>
@@ -5552,7 +5577,7 @@
       </p:sp>
       <p:sp>
         <p:nvSpPr>
-          <p:cNvPr id="18" name="Shape 16"/>
+          <p:cNvPr id="19" name="Shape 17"/>
           <p:cNvSpPr/>
           <p:nvPr/>
         </p:nvSpPr>
@@ -5577,7 +5602,7 @@
       </p:sp>
       <p:sp>
         <p:nvSpPr>
-          <p:cNvPr id="19" name="Text 17"/>
+          <p:cNvPr id="20" name="Text 18"/>
           <p:cNvSpPr/>
           <p:nvPr/>
         </p:nvSpPr>
@@ -5616,7 +5641,7 @@
       </p:sp>
       <p:sp>
         <p:nvSpPr>
-          <p:cNvPr id="20" name="Text 18"/>
+          <p:cNvPr id="21" name="Text 19"/>
           <p:cNvSpPr/>
           <p:nvPr/>
         </p:nvSpPr>
@@ -5642,7 +5667,7 @@
               <a:buNone/>
             </a:pPr>
             <a:r>
-              <a:rPr lang="en-US" sz="1150" dirty="0">
+              <a:rPr lang="en-US" sz="1150" b="1" dirty="0">
                 <a:solidFill>
                   <a:srgbClr val="1F1F1F"/>
                 </a:solidFill>
@@ -5658,7 +5683,7 @@
       </p:sp>
       <p:sp>
         <p:nvSpPr>
-          <p:cNvPr id="21" name="Text 19"/>
+          <p:cNvPr id="22" name="Text 20"/>
           <p:cNvSpPr/>
           <p:nvPr/>
         </p:nvSpPr>
@@ -5697,7 +5722,7 @@
       </p:sp>
       <p:sp>
         <p:nvSpPr>
-          <p:cNvPr id="22" name="Text 20"/>
+          <p:cNvPr id="23" name="Text 21"/>
           <p:cNvSpPr/>
           <p:nvPr/>
         </p:nvSpPr>
@@ -5739,7 +5764,7 @@
       </p:sp>
       <p:sp>
         <p:nvSpPr>
-          <p:cNvPr id="23" name="Shape 21"/>
+          <p:cNvPr id="24" name="Shape 22"/>
           <p:cNvSpPr/>
           <p:nvPr/>
         </p:nvSpPr>
@@ -5764,7 +5789,7 @@
       </p:sp>
       <p:sp>
         <p:nvSpPr>
-          <p:cNvPr id="24" name="Shape 22"/>
+          <p:cNvPr id="25" name="Shape 23"/>
           <p:cNvSpPr/>
           <p:nvPr/>
         </p:nvSpPr>
@@ -5789,7 +5814,7 @@
       </p:sp>
       <p:sp>
         <p:nvSpPr>
-          <p:cNvPr id="25" name="Text 23"/>
+          <p:cNvPr id="26" name="Text 24"/>
           <p:cNvSpPr/>
           <p:nvPr/>
         </p:nvSpPr>
@@ -5828,7 +5853,7 @@
       </p:sp>
       <p:sp>
         <p:nvSpPr>
-          <p:cNvPr id="26" name="Text 24"/>
+          <p:cNvPr id="27" name="Text 25"/>
           <p:cNvSpPr/>
           <p:nvPr/>
         </p:nvSpPr>
@@ -5854,7 +5879,7 @@
               <a:buNone/>
             </a:pPr>
             <a:r>
-              <a:rPr lang="en-US" sz="1150" dirty="0">
+              <a:rPr lang="en-US" sz="1150" b="1" dirty="0">
                 <a:solidFill>
                   <a:srgbClr val="1F1F1F"/>
                 </a:solidFill>
@@ -5870,7 +5895,7 @@
       </p:sp>
       <p:sp>
         <p:nvSpPr>
-          <p:cNvPr id="27" name="Text 25"/>
+          <p:cNvPr id="28" name="Text 26"/>
           <p:cNvSpPr/>
           <p:nvPr/>
         </p:nvSpPr>
@@ -5909,7 +5934,7 @@
       </p:sp>
       <p:sp>
         <p:nvSpPr>
-          <p:cNvPr id="28" name="Text 26"/>
+          <p:cNvPr id="29" name="Text 27"/>
           <p:cNvSpPr/>
           <p:nvPr/>
         </p:nvSpPr>
@@ -5951,7 +5976,7 @@
       </p:sp>
       <p:sp>
         <p:nvSpPr>
-          <p:cNvPr id="29" name="Shape 27"/>
+          <p:cNvPr id="30" name="Shape 28"/>
           <p:cNvSpPr/>
           <p:nvPr/>
         </p:nvSpPr>
@@ -5976,7 +6001,7 @@
       </p:sp>
       <p:sp>
         <p:nvSpPr>
-          <p:cNvPr id="30" name="Text 28"/>
+          <p:cNvPr id="31" name="Text 29"/>
           <p:cNvSpPr/>
           <p:nvPr/>
         </p:nvSpPr>
@@ -6015,7 +6040,7 @@
       </p:sp>
       <p:sp>
         <p:nvSpPr>
-          <p:cNvPr id="31" name="Text 29"/>
+          <p:cNvPr id="32" name="Text 30"/>
           <p:cNvSpPr/>
           <p:nvPr/>
         </p:nvSpPr>
